--- a/docs/アプリケーション構成.pptx
+++ b/docs/アプリケーション構成.pptx
@@ -778,7 +778,7 @@
           <a:p>
             <a:r>
               <a:rPr lang="en-US" dirty="0"/>
-              <a:t>インスタンスを 2 つ以上に増やすと migrate が同時に走ります。増やすときは startup.sh を見直してください。</a:t>
+              <a:t>引き金は main への push ですが、main に直接 push する運用ではありません。ブランチで作ってプルリクエストを出し、レビューを通してマージした結果として main が更新され、そこでデプロイが走ります。Azure へのログインは OIDC で、信頼しているのはこのリポジトリの main だけです。インスタンスを 2 つ以上に増やすと migrate が同時に走るので、増やすときは startup.sh を見直してください。</a:t>
             </a:r>
             <a:endParaRPr lang="en-US" dirty="0"/>
           </a:p>
@@ -4847,7 +4847,7 @@
                 <a:ea typeface="Meiryo" pitchFamily="34" charset="-122"/>
                 <a:cs typeface="Meiryo" pitchFamily="34" charset="-120"/>
               </a:rPr>
-              <a:t>main に push すれば、あとは自動</a:t>
+              <a:t>マージすれば、あとは自動</a:t>
             </a:r>
             <a:endParaRPr lang="en-US" sz="2600" dirty="0"/>
           </a:p>
@@ -4957,7 +4957,7 @@
                 <a:ea typeface="Meiryo" pitchFamily="34" charset="-122"/>
                 <a:cs typeface="Meiryo" pitchFamily="34" charset="-120"/>
               </a:rPr>
-              <a:t>main に push</a:t>
+              <a:t>PR をマージ</a:t>
             </a:r>
             <a:endParaRPr lang="en-US" sz="1250" dirty="0"/>
           </a:p>
@@ -4996,7 +4996,7 @@
                 <a:ea typeface="Meiryo" pitchFamily="34" charset="-122"/>
                 <a:cs typeface="Meiryo" pitchFamily="34" charset="-120"/>
               </a:rPr>
-              <a:t>ブランチを切らず main に直接入れる運用</a:t>
+              <a:t>main が更新されると走る。直接 push はしない</a:t>
             </a:r>
             <a:endParaRPr lang="en-US" sz="1000" dirty="0"/>
           </a:p>
@@ -5145,7 +5145,7 @@
                 <a:ea typeface="Meiryo" pitchFamily="34" charset="-122"/>
                 <a:cs typeface="Meiryo" pitchFamily="34" charset="-120"/>
               </a:rPr>
-              <a:t>zip を作って App Service に送る</a:t>
+              <a:t>zip を作って送る。docs だけの変更では走らない</a:t>
             </a:r>
             <a:endParaRPr lang="en-US" sz="1000" dirty="0"/>
           </a:p>
